--- a/Reporte 200826.pptx
+++ b/Reporte 200826.pptx
@@ -29,14 +29,14 @@
   <p:notesSz cx="6858000" cy="9144000"/>
   <p:embeddedFontLst>
     <p:embeddedFont>
-      <p:font typeface="Montserrat" pitchFamily="2" charset="0"/>
+      <p:font typeface="Montserrat" panose="00000500000000000000" pitchFamily="2" charset="0"/>
       <p:regular r:id="rId19"/>
       <p:bold r:id="rId20"/>
       <p:italic r:id="rId21"/>
       <p:boldItalic r:id="rId22"/>
     </p:embeddedFont>
     <p:embeddedFont>
-      <p:font typeface="Montserrat Black" pitchFamily="2" charset="0"/>
+      <p:font typeface="Montserrat Black" panose="00000A00000000000000" pitchFamily="2" charset="0"/>
       <p:bold r:id="rId23"/>
       <p:boldItalic r:id="rId24"/>
     </p:embeddedFont>
@@ -6553,10 +6553,10 @@
       </p:sp>
       <p:pic>
         <p:nvPicPr>
-          <p:cNvPr id="4" name="Imagen 3">
+          <p:cNvPr id="5" name="Imagen 4">
             <a:extLst>
               <a:ext uri="{FF2B5EF4-FFF2-40B4-BE49-F238E27FC236}">
-                <a16:creationId xmlns:a16="http://schemas.microsoft.com/office/drawing/2014/main" id="{27C49E67-24A8-93B8-2E30-C3B21F1030B1}"/>
+                <a16:creationId xmlns:a16="http://schemas.microsoft.com/office/drawing/2014/main" id="{0D391CCB-225F-D52B-292C-38765BCDED6E}"/>
               </a:ext>
             </a:extLst>
           </p:cNvPr>
@@ -6573,8 +6573,8 @@
         </p:blipFill>
         <p:spPr>
           <a:xfrm>
-            <a:off x="0" y="855467"/>
-            <a:ext cx="9144000" cy="3575441"/>
+            <a:off x="0" y="862087"/>
+            <a:ext cx="9144000" cy="3562202"/>
           </a:xfrm>
           <a:prstGeom prst="rect">
             <a:avLst/>
@@ -6659,10 +6659,10 @@
       </p:sp>
       <p:pic>
         <p:nvPicPr>
-          <p:cNvPr id="3" name="Imagen 2">
+          <p:cNvPr id="4" name="Imagen 3">
             <a:extLst>
               <a:ext uri="{FF2B5EF4-FFF2-40B4-BE49-F238E27FC236}">
-                <a16:creationId xmlns:a16="http://schemas.microsoft.com/office/drawing/2014/main" id="{680D0271-71C1-F611-A368-728C6617D1D8}"/>
+                <a16:creationId xmlns:a16="http://schemas.microsoft.com/office/drawing/2014/main" id="{0FCBA2F6-93CB-B0A2-359D-F88FCCF7F308}"/>
               </a:ext>
             </a:extLst>
           </p:cNvPr>
@@ -6679,8 +6679,8 @@
         </p:blipFill>
         <p:spPr>
           <a:xfrm>
-            <a:off x="0" y="1341614"/>
-            <a:ext cx="9144000" cy="2603148"/>
+            <a:off x="0" y="1330385"/>
+            <a:ext cx="9144000" cy="2625606"/>
           </a:xfrm>
           <a:prstGeom prst="rect">
             <a:avLst/>
@@ -6765,10 +6765,10 @@
       </p:sp>
       <p:pic>
         <p:nvPicPr>
-          <p:cNvPr id="5" name="Imagen 4">
+          <p:cNvPr id="4" name="Imagen 3">
             <a:extLst>
               <a:ext uri="{FF2B5EF4-FFF2-40B4-BE49-F238E27FC236}">
-                <a16:creationId xmlns:a16="http://schemas.microsoft.com/office/drawing/2014/main" id="{70BD544F-4EA7-D90A-2C24-CE42D65257DA}"/>
+                <a16:creationId xmlns:a16="http://schemas.microsoft.com/office/drawing/2014/main" id="{31E5FC2A-3739-D298-7130-F58E8D0CECBB}"/>
               </a:ext>
             </a:extLst>
           </p:cNvPr>
@@ -6785,8 +6785,8 @@
         </p:blipFill>
         <p:spPr>
           <a:xfrm>
-            <a:off x="0" y="705386"/>
-            <a:ext cx="9144000" cy="3875603"/>
+            <a:off x="0" y="744452"/>
+            <a:ext cx="9144000" cy="3797472"/>
           </a:xfrm>
           <a:prstGeom prst="rect">
             <a:avLst/>
@@ -6871,10 +6871,10 @@
       </p:sp>
       <p:pic>
         <p:nvPicPr>
-          <p:cNvPr id="3" name="Imagen 2">
+          <p:cNvPr id="4" name="Imagen 3">
             <a:extLst>
               <a:ext uri="{FF2B5EF4-FFF2-40B4-BE49-F238E27FC236}">
-                <a16:creationId xmlns:a16="http://schemas.microsoft.com/office/drawing/2014/main" id="{33D96725-29F0-496E-5591-554EA2C71AB9}"/>
+                <a16:creationId xmlns:a16="http://schemas.microsoft.com/office/drawing/2014/main" id="{56F503F8-02A8-9B90-7F06-A156111D9EC2}"/>
               </a:ext>
             </a:extLst>
           </p:cNvPr>
@@ -6891,8 +6891,8 @@
         </p:blipFill>
         <p:spPr>
           <a:xfrm>
-            <a:off x="0" y="1261191"/>
-            <a:ext cx="9144000" cy="2763994"/>
+            <a:off x="0" y="1288802"/>
+            <a:ext cx="9144000" cy="2708771"/>
           </a:xfrm>
           <a:prstGeom prst="rect">
             <a:avLst/>
@@ -6977,10 +6977,10 @@
       </p:sp>
       <p:pic>
         <p:nvPicPr>
-          <p:cNvPr id="3" name="Imagen 2">
+          <p:cNvPr id="4" name="Imagen 3">
             <a:extLst>
               <a:ext uri="{FF2B5EF4-FFF2-40B4-BE49-F238E27FC236}">
-                <a16:creationId xmlns:a16="http://schemas.microsoft.com/office/drawing/2014/main" id="{C49D148A-1589-DF4F-DD56-EEE42C091A81}"/>
+                <a16:creationId xmlns:a16="http://schemas.microsoft.com/office/drawing/2014/main" id="{9B3956FC-BC00-BAE9-58FF-7C8D90A73B58}"/>
               </a:ext>
             </a:extLst>
           </p:cNvPr>
@@ -6997,8 +6997,8 @@
         </p:blipFill>
         <p:spPr>
           <a:xfrm>
-            <a:off x="0" y="597953"/>
-            <a:ext cx="9144000" cy="4090470"/>
+            <a:off x="0" y="699327"/>
+            <a:ext cx="9144000" cy="3887721"/>
           </a:xfrm>
           <a:prstGeom prst="rect">
             <a:avLst/>
@@ -7089,10 +7089,10 @@
       </p:sp>
       <p:pic>
         <p:nvPicPr>
-          <p:cNvPr id="4" name="Imagen 3">
+          <p:cNvPr id="3" name="Imagen 2">
             <a:extLst>
               <a:ext uri="{FF2B5EF4-FFF2-40B4-BE49-F238E27FC236}">
-                <a16:creationId xmlns:a16="http://schemas.microsoft.com/office/drawing/2014/main" id="{FD5606E0-28F1-1D4A-2931-7EDECC18859A}"/>
+                <a16:creationId xmlns:a16="http://schemas.microsoft.com/office/drawing/2014/main" id="{31D026F9-5336-9465-29DA-968ACF4CDE79}"/>
               </a:ext>
             </a:extLst>
           </p:cNvPr>
@@ -7109,8 +7109,38 @@
         </p:blipFill>
         <p:spPr>
           <a:xfrm>
-            <a:off x="308832" y="454267"/>
-            <a:ext cx="8453312" cy="4481469"/>
+            <a:off x="0" y="525013"/>
+            <a:ext cx="9144000" cy="3747873"/>
+          </a:xfrm>
+          <a:prstGeom prst="rect">
+            <a:avLst/>
+          </a:prstGeom>
+        </p:spPr>
+      </p:pic>
+      <p:pic>
+        <p:nvPicPr>
+          <p:cNvPr id="7" name="Imagen 6">
+            <a:extLst>
+              <a:ext uri="{FF2B5EF4-FFF2-40B4-BE49-F238E27FC236}">
+                <a16:creationId xmlns:a16="http://schemas.microsoft.com/office/drawing/2014/main" id="{0E698EB7-ABE9-66DD-9B9B-5C4C07B9E861}"/>
+              </a:ext>
+            </a:extLst>
+          </p:cNvPr>
+          <p:cNvPicPr>
+            <a:picLocks noChangeAspect="1"/>
+          </p:cNvPicPr>
+          <p:nvPr/>
+        </p:nvPicPr>
+        <p:blipFill>
+          <a:blip r:embed="rId3"/>
+          <a:stretch>
+            <a:fillRect/>
+          </a:stretch>
+        </p:blipFill>
+        <p:spPr>
+          <a:xfrm>
+            <a:off x="210993" y="2797625"/>
+            <a:ext cx="2429214" cy="2257740"/>
           </a:xfrm>
           <a:prstGeom prst="rect">
             <a:avLst/>
